--- a/docs/sunum/sirket/apya-sunum-sirket.pptx
+++ b/docs/sunum/sirket/apya-sunum-sirket.pptx
@@ -608,7 +608,7 @@
               <a:rPr lang="en-US" dirty="0"/>
               <a:t>Rapor için kimseden veri istemezsiniz
 Günlük çalışırken girilen kayıtlar raporu zaten oluşturur.
-Her rapor Excel veya PDF olarak indirilir; tarih aralığı, proje ve müşteri filtreleri hazır gelir.</a:t>
+Proje bütçesi raporu Excel veya PDF olarak iner; bütçe kalemleri, dilimler ve revizyonlar Finans Merkezi'nde her an günceldir, Genel Bakış olduğu gibi kağıda dökülür.</a:t>
             </a:r>
             <a:endParaRPr lang="en-US" dirty="0"/>
           </a:p>
@@ -697,8 +697,8 @@
             <a:r>
               <a:rPr lang="en-US" dirty="0"/>
               <a:t>Size uygun hibeyi kaçırmayın
-Açık çağrılar tek listede; profilinize uyanlar öne çıkar.
-Kazanılan hibe normal bir projeye dönüşür — bütçesi, görevleri ve harcama belgeleriyle aynı sistemde yürür.</a:t>
+Uyan çağrılar öne çıkar; başvuruyu danışmanınızla birlikte hazırlarsınız.
+Bugün ekranı sıradaki işi risk ve tutara göre sıralar; Hibe Yolculuğum bütün süreçleri çağrı başına tek satırda gösterir. Kazanılan hibe normal bir projeye dönüşür — bütçesi, görevleri ve belgeleriyle aynı sistemde yürür.</a:t>
             </a:r>
             <a:endParaRPr lang="en-US" dirty="0"/>
           </a:p>
@@ -878,7 +878,7 @@
               <a:rPr lang="en-US" dirty="0"/>
               <a:t>Şirketiniz kendi kapalı alanında
 Birden fazla şirketi tek platformda, birbirine karıştırmadan yönetirsiniz.
-Grup şirketleri, şubeler veya farklı markalar ayrı bölmelerde durur; raporlarınız yalnızca kendi verinizi kapsar.</a:t>
+Grup şirketleri, şubeler veya farklı markalar ayrı bölmelerde durur; fatura ve pano çıktılarında şirketinizin resmî unvanı yer alır, raporlarınız yalnızca kendi verinizi kapsar.</a:t>
             </a:r>
             <a:endParaRPr lang="en-US" dirty="0"/>
           </a:p>
@@ -1327,7 +1327,7 @@
               <a:rPr lang="en-US" dirty="0"/>
               <a:t>İşin baştan sona yolculuğu
 Sistemde her şey bu beş adımın üzerinde ilerler.
-Her adım bir sonrakini otomatik besler: görevi tamamladığınızda bütçe, faturayı kestiğinizde kasa ve cari, ay sonunda ise rapor kendiliğinden güncellenir.</a:t>
+Her adım bir sonrakini otomatik besler: görevi tamamladığınızda bütçe kalemi, faturayı kestiğinizde kasa, ay sonunda ise rapor kendiliğinden güncellenir.</a:t>
             </a:r>
             <a:endParaRPr lang="en-US" dirty="0"/>
           </a:p>
@@ -1417,7 +1417,7 @@
               <a:rPr lang="en-US" dirty="0"/>
               <a:t>Sabah açtığınızda gördüğünüz ekran
 Gününüze nereden başlayacağınızı söyleyen tek sayfa.
-Her rakam tıklanabilir: “5 geciken görev” yazısına bastığınızda o beş görevin listesine inersiniz.</a:t>
+Görünüm role göre gelir: Proje Yönetimi, Finans, Bugün, Hibe takibi. Kart ekler, çıkarır, sürükleyip boyutlandırırsınız; her rakam tıklanınca ilgili listeye iner, sayfa tek tıkla yazdırılır.</a:t>
             </a:r>
             <a:endParaRPr lang="en-US" dirty="0"/>
           </a:p>
@@ -1507,7 +1507,7 @@
               <a:rPr lang="en-US" dirty="0"/>
               <a:t>Her projenin kendi konsolu var
 İşin durumu ve parası aynı ekranda, yan yana.
-Proje kâr ediyor mu diye tahmin etmezsiniz: harcanan tutar görevlerden, bütçe ise proje tanımından gelir; ikisi aynı satırda görünür.</a:t>
+Proje kâr ediyor mu diye tahmin etmezsiniz: harcama görevin içinden bütçe kalemine bağlı girilir, bütçe rakamı her ekranda aynıdır. Projeden finans ve belge ekranlarına tek tıkla geçilir.</a:t>
             </a:r>
             <a:endParaRPr lang="en-US" dirty="0"/>
           </a:p>
@@ -1597,7 +1597,7 @@
               <a:rPr lang="en-US" dirty="0"/>
               <a:t>Aynı görevler, dört farklı bakış
 Veri tek; herkes kendine uygun görünümü seçer.
-Kanban'da bir kartı sürüklediğinizde liste, takvim ve Gantt aynı anda değişir — çünkü hepsi aynı görevi gösterir.</a:t>
+Kart Panosu'nda bir kartı sürüklediğinizde liste, takvim ve zaman çizelgesi aynı anda değişir — çünkü hepsi aynı görevi gösterir. Bir görev ekip dışından birine de açılabilir; ekip içi yazışma dışarı çıkmaz.</a:t>
             </a:r>
             <a:endParaRPr lang="en-US" dirty="0"/>
           </a:p>
@@ -1687,7 +1687,7 @@
               <a:rPr lang="en-US" dirty="0"/>
               <a:t>Para nereden geldi, nereye gitti
 Muhasebe bilgisi gerektirmeden, doğru kayıt otomatik oluşur.
-Siz sadece “fatura kestim” veya “şu gideri ödedim” dersiniz; kasa, cari ve proje maliyeti arkada kendiliğinden işlenir.</a:t>
+Siz sadece “fatura kestim” veya “şu gideri ödedim” dersiniz; kasa, bütçe kalemi ve dilim arkada kendiliğinden işlenir. Kesintiyi kalemlere dağıtıp yeni bütçe revizyonu üretirsiniz; döviz bütçeli projede kur TCMB'den otomatik çekilir, üç rakam birden görünür.</a:t>
             </a:r>
             <a:endParaRPr lang="en-US" dirty="0"/>
           </a:p>
@@ -1776,8 +1776,8 @@
             <a:r>
               <a:rPr lang="en-US" dirty="0"/>
               <a:t>Belgeler klasörde değil, işin yanında
-Her dosya ait olduğu projeye ve göreve bağlı durur.
-Aynı dosyanın yeni sürümünü yüklediğinizde eskisi silinmez, arşive iner. “Hangisi güncel?” sorusu ortadan kalkar.</a:t>
+Her dosya projesine bağlı durur; süreç şeridi sırada ne olduğunu söyler.
+Aynı dosyanın yeni sürümünü yüklediğinizde eskisi silinmez, arşive iner. Belge açığı finans ekranında da görünür; “Hangisi güncel?” sorusu ortadan kalkar.</a:t>
             </a:r>
             <a:endParaRPr lang="en-US" dirty="0"/>
           </a:p>
@@ -2152,7 +2152,7 @@
       </p:grpSpPr>
       <p:pic>
         <p:nvPicPr>
-          <p:cNvPr id="2" name="Image 0" descr="E:\Developer\GİT\hitprot-platform\.claude\worktrees\dernek-sunumu\docs\sunum\sirket\gorseller\slayt-01.png">    </p:cNvPr>
+          <p:cNvPr id="2" name="Image 0" descr="/home/claude/sunum/docs/sunum/sirket/gorseller/slayt-01.png">    </p:cNvPr>
           <p:cNvPicPr>
             <a:picLocks noChangeAspect="1"/>
           </p:cNvPicPr>
@@ -2208,7 +2208,7 @@
       </p:grpSpPr>
       <p:pic>
         <p:nvPicPr>
-          <p:cNvPr id="2" name="Image 0" descr="E:\Developer\GİT\hitprot-platform\.claude\worktrees\dernek-sunumu\docs\sunum\sirket\gorseller\slayt-10.png">    </p:cNvPr>
+          <p:cNvPr id="2" name="Image 0" descr="/home/claude/sunum/docs/sunum/sirket/gorseller/slayt-10.png">    </p:cNvPr>
           <p:cNvPicPr>
             <a:picLocks noChangeAspect="1"/>
           </p:cNvPicPr>
@@ -2264,7 +2264,7 @@
       </p:grpSpPr>
       <p:pic>
         <p:nvPicPr>
-          <p:cNvPr id="2" name="Image 0" descr="E:\Developer\GİT\hitprot-platform\.claude\worktrees\dernek-sunumu\docs\sunum\sirket\gorseller\slayt-11.png">    </p:cNvPr>
+          <p:cNvPr id="2" name="Image 0" descr="/home/claude/sunum/docs/sunum/sirket/gorseller/slayt-11.png">    </p:cNvPr>
           <p:cNvPicPr>
             <a:picLocks noChangeAspect="1"/>
           </p:cNvPicPr>
@@ -2320,7 +2320,7 @@
       </p:grpSpPr>
       <p:pic>
         <p:nvPicPr>
-          <p:cNvPr id="2" name="Image 0" descr="E:\Developer\GİT\hitprot-platform\.claude\worktrees\dernek-sunumu\docs\sunum\sirket\gorseller\slayt-12.png">    </p:cNvPr>
+          <p:cNvPr id="2" name="Image 0" descr="/home/claude/sunum/docs/sunum/sirket/gorseller/slayt-12.png">    </p:cNvPr>
           <p:cNvPicPr>
             <a:picLocks noChangeAspect="1"/>
           </p:cNvPicPr>
@@ -2376,7 +2376,7 @@
       </p:grpSpPr>
       <p:pic>
         <p:nvPicPr>
-          <p:cNvPr id="2" name="Image 0" descr="E:\Developer\GİT\hitprot-platform\.claude\worktrees\dernek-sunumu\docs\sunum\sirket\gorseller\slayt-13.png">    </p:cNvPr>
+          <p:cNvPr id="2" name="Image 0" descr="/home/claude/sunum/docs/sunum/sirket/gorseller/slayt-13.png">    </p:cNvPr>
           <p:cNvPicPr>
             <a:picLocks noChangeAspect="1"/>
           </p:cNvPicPr>
@@ -2432,7 +2432,7 @@
       </p:grpSpPr>
       <p:pic>
         <p:nvPicPr>
-          <p:cNvPr id="2" name="Image 0" descr="E:\Developer\GİT\hitprot-platform\.claude\worktrees\dernek-sunumu\docs\sunum\sirket\gorseller\slayt-14.png">    </p:cNvPr>
+          <p:cNvPr id="2" name="Image 0" descr="/home/claude/sunum/docs/sunum/sirket/gorseller/slayt-14.png">    </p:cNvPr>
           <p:cNvPicPr>
             <a:picLocks noChangeAspect="1"/>
           </p:cNvPicPr>
@@ -2488,7 +2488,7 @@
       </p:grpSpPr>
       <p:pic>
         <p:nvPicPr>
-          <p:cNvPr id="2" name="Image 0" descr="E:\Developer\GİT\hitprot-platform\.claude\worktrees\dernek-sunumu\docs\sunum\sirket\gorseller\slayt-15.png">    </p:cNvPr>
+          <p:cNvPr id="2" name="Image 0" descr="/home/claude/sunum/docs/sunum/sirket/gorseller/slayt-15.png">    </p:cNvPr>
           <p:cNvPicPr>
             <a:picLocks noChangeAspect="1"/>
           </p:cNvPicPr>
@@ -2544,7 +2544,7 @@
       </p:grpSpPr>
       <p:pic>
         <p:nvPicPr>
-          <p:cNvPr id="2" name="Image 0" descr="E:\Developer\GİT\hitprot-platform\.claude\worktrees\dernek-sunumu\docs\sunum\sirket\gorseller\slayt-02.png">    </p:cNvPr>
+          <p:cNvPr id="2" name="Image 0" descr="/home/claude/sunum/docs/sunum/sirket/gorseller/slayt-02.png">    </p:cNvPr>
           <p:cNvPicPr>
             <a:picLocks noChangeAspect="1"/>
           </p:cNvPicPr>
@@ -2600,7 +2600,7 @@
       </p:grpSpPr>
       <p:pic>
         <p:nvPicPr>
-          <p:cNvPr id="2" name="Image 0" descr="E:\Developer\GİT\hitprot-platform\.claude\worktrees\dernek-sunumu\docs\sunum\sirket\gorseller\slayt-03.png">    </p:cNvPr>
+          <p:cNvPr id="2" name="Image 0" descr="/home/claude/sunum/docs/sunum/sirket/gorseller/slayt-03.png">    </p:cNvPr>
           <p:cNvPicPr>
             <a:picLocks noChangeAspect="1"/>
           </p:cNvPicPr>
@@ -2656,7 +2656,7 @@
       </p:grpSpPr>
       <p:pic>
         <p:nvPicPr>
-          <p:cNvPr id="2" name="Image 0" descr="E:\Developer\GİT\hitprot-platform\.claude\worktrees\dernek-sunumu\docs\sunum\sirket\gorseller\slayt-04.png">    </p:cNvPr>
+          <p:cNvPr id="2" name="Image 0" descr="/home/claude/sunum/docs/sunum/sirket/gorseller/slayt-04.png">    </p:cNvPr>
           <p:cNvPicPr>
             <a:picLocks noChangeAspect="1"/>
           </p:cNvPicPr>
@@ -2712,7 +2712,7 @@
       </p:grpSpPr>
       <p:pic>
         <p:nvPicPr>
-          <p:cNvPr id="2" name="Image 0" descr="E:\Developer\GİT\hitprot-platform\.claude\worktrees\dernek-sunumu\docs\sunum\sirket\gorseller\slayt-05.png">    </p:cNvPr>
+          <p:cNvPr id="2" name="Image 0" descr="/home/claude/sunum/docs/sunum/sirket/gorseller/slayt-05.png">    </p:cNvPr>
           <p:cNvPicPr>
             <a:picLocks noChangeAspect="1"/>
           </p:cNvPicPr>
@@ -2768,7 +2768,7 @@
       </p:grpSpPr>
       <p:pic>
         <p:nvPicPr>
-          <p:cNvPr id="2" name="Image 0" descr="E:\Developer\GİT\hitprot-platform\.claude\worktrees\dernek-sunumu\docs\sunum\sirket\gorseller\slayt-06.png">    </p:cNvPr>
+          <p:cNvPr id="2" name="Image 0" descr="/home/claude/sunum/docs/sunum/sirket/gorseller/slayt-06.png">    </p:cNvPr>
           <p:cNvPicPr>
             <a:picLocks noChangeAspect="1"/>
           </p:cNvPicPr>
@@ -2824,7 +2824,7 @@
       </p:grpSpPr>
       <p:pic>
         <p:nvPicPr>
-          <p:cNvPr id="2" name="Image 0" descr="E:\Developer\GİT\hitprot-platform\.claude\worktrees\dernek-sunumu\docs\sunum\sirket\gorseller\slayt-07.png">    </p:cNvPr>
+          <p:cNvPr id="2" name="Image 0" descr="/home/claude/sunum/docs/sunum/sirket/gorseller/slayt-07.png">    </p:cNvPr>
           <p:cNvPicPr>
             <a:picLocks noChangeAspect="1"/>
           </p:cNvPicPr>
@@ -2880,7 +2880,7 @@
       </p:grpSpPr>
       <p:pic>
         <p:nvPicPr>
-          <p:cNvPr id="2" name="Image 0" descr="E:\Developer\GİT\hitprot-platform\.claude\worktrees\dernek-sunumu\docs\sunum\sirket\gorseller\slayt-08.png">    </p:cNvPr>
+          <p:cNvPr id="2" name="Image 0" descr="/home/claude/sunum/docs/sunum/sirket/gorseller/slayt-08.png">    </p:cNvPr>
           <p:cNvPicPr>
             <a:picLocks noChangeAspect="1"/>
           </p:cNvPicPr>
@@ -2936,7 +2936,7 @@
       </p:grpSpPr>
       <p:pic>
         <p:nvPicPr>
-          <p:cNvPr id="2" name="Image 0" descr="E:\Developer\GİT\hitprot-platform\.claude\worktrees\dernek-sunumu\docs\sunum\sirket\gorseller\slayt-09.png">    </p:cNvPr>
+          <p:cNvPr id="2" name="Image 0" descr="/home/claude/sunum/docs/sunum/sirket/gorseller/slayt-09.png">    </p:cNvPr>
           <p:cNvPicPr>
             <a:picLocks noChangeAspect="1"/>
           </p:cNvPicPr>
